--- a/ゲーム科2年/00_前期/ゲーム開発Ⅰ/10_カメラ操作.pptx
+++ b/ゲーム科2年/00_前期/ゲーム開発Ⅰ/10_カメラ操作.pptx
@@ -263,7 +263,7 @@
           <a:p>
             <a:fld id="{E9CC885B-4903-4D54-9A93-00025F12DED9}" type="datetimeFigureOut">
               <a:rPr kumimoji="1" lang="ja-JP" altLang="en-US" smtClean="0"/>
-              <a:t>2024/9/30</a:t>
+              <a:t>2025/2/7</a:t>
             </a:fld>
             <a:endParaRPr kumimoji="1" lang="ja-JP" altLang="en-US"/>
           </a:p>
@@ -493,7 +493,7 @@
           <a:p>
             <a:fld id="{E9CC885B-4903-4D54-9A93-00025F12DED9}" type="datetimeFigureOut">
               <a:rPr kumimoji="1" lang="ja-JP" altLang="en-US" smtClean="0"/>
-              <a:t>2024/9/30</a:t>
+              <a:t>2025/2/7</a:t>
             </a:fld>
             <a:endParaRPr kumimoji="1" lang="ja-JP" altLang="en-US"/>
           </a:p>
@@ -733,7 +733,7 @@
           <a:p>
             <a:fld id="{E9CC885B-4903-4D54-9A93-00025F12DED9}" type="datetimeFigureOut">
               <a:rPr kumimoji="1" lang="ja-JP" altLang="en-US" smtClean="0"/>
-              <a:t>2024/9/30</a:t>
+              <a:t>2025/2/7</a:t>
             </a:fld>
             <a:endParaRPr kumimoji="1" lang="ja-JP" altLang="en-US"/>
           </a:p>
@@ -963,7 +963,7 @@
           <a:p>
             <a:fld id="{E9CC885B-4903-4D54-9A93-00025F12DED9}" type="datetimeFigureOut">
               <a:rPr kumimoji="1" lang="ja-JP" altLang="en-US" smtClean="0"/>
-              <a:t>2024/9/30</a:t>
+              <a:t>2025/2/7</a:t>
             </a:fld>
             <a:endParaRPr kumimoji="1" lang="ja-JP" altLang="en-US"/>
           </a:p>
@@ -1238,7 +1238,7 @@
           <a:p>
             <a:fld id="{E9CC885B-4903-4D54-9A93-00025F12DED9}" type="datetimeFigureOut">
               <a:rPr kumimoji="1" lang="ja-JP" altLang="en-US" smtClean="0"/>
-              <a:t>2024/9/30</a:t>
+              <a:t>2025/2/7</a:t>
             </a:fld>
             <a:endParaRPr kumimoji="1" lang="ja-JP" altLang="en-US"/>
           </a:p>
@@ -1567,7 +1567,7 @@
           <a:p>
             <a:fld id="{E9CC885B-4903-4D54-9A93-00025F12DED9}" type="datetimeFigureOut">
               <a:rPr kumimoji="1" lang="ja-JP" altLang="en-US" smtClean="0"/>
-              <a:t>2024/9/30</a:t>
+              <a:t>2025/2/7</a:t>
             </a:fld>
             <a:endParaRPr kumimoji="1" lang="ja-JP" altLang="en-US"/>
           </a:p>
@@ -2043,7 +2043,7 @@
           <a:p>
             <a:fld id="{E9CC885B-4903-4D54-9A93-00025F12DED9}" type="datetimeFigureOut">
               <a:rPr kumimoji="1" lang="ja-JP" altLang="en-US" smtClean="0"/>
-              <a:t>2024/9/30</a:t>
+              <a:t>2025/2/7</a:t>
             </a:fld>
             <a:endParaRPr kumimoji="1" lang="ja-JP" altLang="en-US"/>
           </a:p>
@@ -2184,7 +2184,7 @@
           <a:p>
             <a:fld id="{E9CC885B-4903-4D54-9A93-00025F12DED9}" type="datetimeFigureOut">
               <a:rPr kumimoji="1" lang="ja-JP" altLang="en-US" smtClean="0"/>
-              <a:t>2024/9/30</a:t>
+              <a:t>2025/2/7</a:t>
             </a:fld>
             <a:endParaRPr kumimoji="1" lang="ja-JP" altLang="en-US"/>
           </a:p>
@@ -2297,7 +2297,7 @@
           <a:p>
             <a:fld id="{E9CC885B-4903-4D54-9A93-00025F12DED9}" type="datetimeFigureOut">
               <a:rPr kumimoji="1" lang="ja-JP" altLang="en-US" smtClean="0"/>
-              <a:t>2024/9/30</a:t>
+              <a:t>2025/2/7</a:t>
             </a:fld>
             <a:endParaRPr kumimoji="1" lang="ja-JP" altLang="en-US"/>
           </a:p>
@@ -2640,7 +2640,7 @@
           <a:p>
             <a:fld id="{E9CC885B-4903-4D54-9A93-00025F12DED9}" type="datetimeFigureOut">
               <a:rPr kumimoji="1" lang="ja-JP" altLang="en-US" smtClean="0"/>
-              <a:t>2024/9/30</a:t>
+              <a:t>2025/2/7</a:t>
             </a:fld>
             <a:endParaRPr kumimoji="1" lang="ja-JP" altLang="en-US"/>
           </a:p>
@@ -2928,7 +2928,7 @@
           <a:p>
             <a:fld id="{E9CC885B-4903-4D54-9A93-00025F12DED9}" type="datetimeFigureOut">
               <a:rPr kumimoji="1" lang="ja-JP" altLang="en-US" smtClean="0"/>
-              <a:t>2024/9/30</a:t>
+              <a:t>2025/2/7</a:t>
             </a:fld>
             <a:endParaRPr kumimoji="1" lang="ja-JP" altLang="en-US"/>
           </a:p>
@@ -3201,7 +3201,7 @@
           <a:p>
             <a:fld id="{E9CC885B-4903-4D54-9A93-00025F12DED9}" type="datetimeFigureOut">
               <a:rPr kumimoji="1" lang="ja-JP" altLang="en-US" smtClean="0"/>
-              <a:t>2024/9/30</a:t>
+              <a:t>2025/2/7</a:t>
             </a:fld>
             <a:endParaRPr kumimoji="1" lang="ja-JP" altLang="en-US"/>
           </a:p>
@@ -5418,7 +5418,7 @@
         <p:spPr>
           <a:xfrm>
             <a:off x="567542" y="1216429"/>
-            <a:ext cx="6917278" cy="461665"/>
+            <a:ext cx="7018268" cy="461665"/>
           </a:xfrm>
           <a:prstGeom prst="rect">
             <a:avLst/>
@@ -5432,7 +5432,11 @@
           <a:lstStyle/>
           <a:p>
             <a:r>
-              <a:rPr lang="en-US" altLang="ja-JP" sz="2400" dirty="0"/>
+              <a:rPr lang="en-US" altLang="ja-JP" sz="2400" b="1" dirty="0">
+                <a:solidFill>
+                  <a:srgbClr val="FF0000"/>
+                </a:solidFill>
+              </a:rPr>
               <a:t>Camera.cpp</a:t>
             </a:r>
             <a:r>
@@ -5440,12 +5444,24 @@
               <a:t>の</a:t>
             </a:r>
             <a:r>
-              <a:rPr lang="en-US" altLang="ja-JP" sz="2400" dirty="0"/>
+              <a:rPr lang="en-US" altLang="ja-JP" sz="2400" b="1" dirty="0">
+                <a:solidFill>
+                  <a:srgbClr val="0070C0"/>
+                </a:solidFill>
+              </a:rPr>
               <a:t>Update</a:t>
             </a:r>
             <a:r>
+              <a:rPr lang="ja-JP" altLang="en-US" sz="2400" b="1" dirty="0">
+                <a:solidFill>
+                  <a:srgbClr val="0070C0"/>
+                </a:solidFill>
+              </a:rPr>
+              <a:t>関数</a:t>
+            </a:r>
+            <a:r>
               <a:rPr lang="ja-JP" altLang="en-US" sz="2400" dirty="0"/>
-              <a:t>関数を完成させましょう。</a:t>
+              <a:t>を完成させましょう。</a:t>
             </a:r>
             <a:endParaRPr lang="en-US" altLang="ja-JP" sz="2400" dirty="0"/>
           </a:p>
